--- a/docs/Manhunt模组宣传.pptx
+++ b/docs/Manhunt模组宣传.pptx
@@ -9795,7 +9795,7 @@
                 <a:ea typeface="Microsoft YaHei" pitchFamily="34" charset="-122"/>
                 <a:cs typeface="Microsoft YaHei" pitchFamily="34" charset="-120"/>
               </a:rPr>
-              <a:t>要塞激活后全队收获鞘翅与末影之眼，屠龙即胜</a:t>
+              <a:t>要塞激活后全队获得末影之眼 ×12，开启传送门，屠龙即胜</a:t>
             </a:r>
             <a:endParaRPr lang="en-US" sz="1150" dirty="0"/>
           </a:p>
@@ -11920,7 +11920,7 @@
                 <a:ea typeface="Microsoft YaHei" pitchFamily="34" charset="-122"/>
                 <a:cs typeface="Microsoft YaHei" pitchFamily="34" charset="-120"/>
               </a:rPr>
-              <a:t>全队获得鞘翅 ×1 + 末影之眼 ×12</a:t>
+              <a:t>全队获得末影之眼 ×12，开启传送门</a:t>
             </a:r>
             <a:endParaRPr lang="en-US" sz="1250" dirty="0"/>
           </a:p>
